--- a/ゲーム科2年/00_前期/ゲーム開発Ⅰ/01_3Dモデルの描画.pptx
+++ b/ゲーム科2年/00_前期/ゲーム開発Ⅰ/01_3Dモデルの描画.pptx
@@ -273,7 +273,7 @@
           <a:p>
             <a:fld id="{E9CC885B-4903-4D54-9A93-00025F12DED9}" type="datetimeFigureOut">
               <a:rPr kumimoji="1" lang="ja-JP" altLang="en-US" smtClean="0"/>
-              <a:t>2024/11/19</a:t>
+              <a:t>2025/2/7</a:t>
             </a:fld>
             <a:endParaRPr kumimoji="1" lang="ja-JP" altLang="en-US"/>
           </a:p>
@@ -503,7 +503,7 @@
           <a:p>
             <a:fld id="{E9CC885B-4903-4D54-9A93-00025F12DED9}" type="datetimeFigureOut">
               <a:rPr kumimoji="1" lang="ja-JP" altLang="en-US" smtClean="0"/>
-              <a:t>2024/11/19</a:t>
+              <a:t>2025/2/7</a:t>
             </a:fld>
             <a:endParaRPr kumimoji="1" lang="ja-JP" altLang="en-US"/>
           </a:p>
@@ -743,7 +743,7 @@
           <a:p>
             <a:fld id="{E9CC885B-4903-4D54-9A93-00025F12DED9}" type="datetimeFigureOut">
               <a:rPr kumimoji="1" lang="ja-JP" altLang="en-US" smtClean="0"/>
-              <a:t>2024/11/19</a:t>
+              <a:t>2025/2/7</a:t>
             </a:fld>
             <a:endParaRPr kumimoji="1" lang="ja-JP" altLang="en-US"/>
           </a:p>
@@ -973,7 +973,7 @@
           <a:p>
             <a:fld id="{E9CC885B-4903-4D54-9A93-00025F12DED9}" type="datetimeFigureOut">
               <a:rPr kumimoji="1" lang="ja-JP" altLang="en-US" smtClean="0"/>
-              <a:t>2024/11/19</a:t>
+              <a:t>2025/2/7</a:t>
             </a:fld>
             <a:endParaRPr kumimoji="1" lang="ja-JP" altLang="en-US"/>
           </a:p>
@@ -1248,7 +1248,7 @@
           <a:p>
             <a:fld id="{E9CC885B-4903-4D54-9A93-00025F12DED9}" type="datetimeFigureOut">
               <a:rPr kumimoji="1" lang="ja-JP" altLang="en-US" smtClean="0"/>
-              <a:t>2024/11/19</a:t>
+              <a:t>2025/2/7</a:t>
             </a:fld>
             <a:endParaRPr kumimoji="1" lang="ja-JP" altLang="en-US"/>
           </a:p>
@@ -1577,7 +1577,7 @@
           <a:p>
             <a:fld id="{E9CC885B-4903-4D54-9A93-00025F12DED9}" type="datetimeFigureOut">
               <a:rPr kumimoji="1" lang="ja-JP" altLang="en-US" smtClean="0"/>
-              <a:t>2024/11/19</a:t>
+              <a:t>2025/2/7</a:t>
             </a:fld>
             <a:endParaRPr kumimoji="1" lang="ja-JP" altLang="en-US"/>
           </a:p>
@@ -2053,7 +2053,7 @@
           <a:p>
             <a:fld id="{E9CC885B-4903-4D54-9A93-00025F12DED9}" type="datetimeFigureOut">
               <a:rPr kumimoji="1" lang="ja-JP" altLang="en-US" smtClean="0"/>
-              <a:t>2024/11/19</a:t>
+              <a:t>2025/2/7</a:t>
             </a:fld>
             <a:endParaRPr kumimoji="1" lang="ja-JP" altLang="en-US"/>
           </a:p>
@@ -2194,7 +2194,7 @@
           <a:p>
             <a:fld id="{E9CC885B-4903-4D54-9A93-00025F12DED9}" type="datetimeFigureOut">
               <a:rPr kumimoji="1" lang="ja-JP" altLang="en-US" smtClean="0"/>
-              <a:t>2024/11/19</a:t>
+              <a:t>2025/2/7</a:t>
             </a:fld>
             <a:endParaRPr kumimoji="1" lang="ja-JP" altLang="en-US"/>
           </a:p>
@@ -2307,7 +2307,7 @@
           <a:p>
             <a:fld id="{E9CC885B-4903-4D54-9A93-00025F12DED9}" type="datetimeFigureOut">
               <a:rPr kumimoji="1" lang="ja-JP" altLang="en-US" smtClean="0"/>
-              <a:t>2024/11/19</a:t>
+              <a:t>2025/2/7</a:t>
             </a:fld>
             <a:endParaRPr kumimoji="1" lang="ja-JP" altLang="en-US"/>
           </a:p>
@@ -2650,7 +2650,7 @@
           <a:p>
             <a:fld id="{E9CC885B-4903-4D54-9A93-00025F12DED9}" type="datetimeFigureOut">
               <a:rPr kumimoji="1" lang="ja-JP" altLang="en-US" smtClean="0"/>
-              <a:t>2024/11/19</a:t>
+              <a:t>2025/2/7</a:t>
             </a:fld>
             <a:endParaRPr kumimoji="1" lang="ja-JP" altLang="en-US"/>
           </a:p>
@@ -2938,7 +2938,7 @@
           <a:p>
             <a:fld id="{E9CC885B-4903-4D54-9A93-00025F12DED9}" type="datetimeFigureOut">
               <a:rPr kumimoji="1" lang="ja-JP" altLang="en-US" smtClean="0"/>
-              <a:t>2024/11/19</a:t>
+              <a:t>2025/2/7</a:t>
             </a:fld>
             <a:endParaRPr kumimoji="1" lang="ja-JP" altLang="en-US"/>
           </a:p>
@@ -3211,7 +3211,7 @@
           <a:p>
             <a:fld id="{E9CC885B-4903-4D54-9A93-00025F12DED9}" type="datetimeFigureOut">
               <a:rPr kumimoji="1" lang="ja-JP" altLang="en-US" smtClean="0"/>
-              <a:t>2024/11/19</a:t>
+              <a:t>2025/2/7</a:t>
             </a:fld>
             <a:endParaRPr kumimoji="1" lang="ja-JP" altLang="en-US"/>
           </a:p>
@@ -6159,7 +6159,7 @@
         <p:spPr>
           <a:xfrm>
             <a:off x="567542" y="1216429"/>
-            <a:ext cx="10033516" cy="1200329"/>
+            <a:ext cx="7263527" cy="1200329"/>
           </a:xfrm>
           <a:prstGeom prst="rect">
             <a:avLst/>
@@ -6189,11 +6189,18 @@
                   <a:srgbClr val="FF0000"/>
                 </a:solidFill>
               </a:rPr>
-              <a:t>カメラ自身の座標</a:t>
+              <a:t>カメラ自身の座標（視点）</a:t>
             </a:r>
             <a:r>
               <a:rPr lang="ja-JP" altLang="en-US" sz="2400" dirty="0"/>
-              <a:t>と、どこを撮影するかの</a:t>
+              <a:t>と、</a:t>
+            </a:r>
+            <a:endParaRPr lang="en-US" altLang="ja-JP" sz="2400" dirty="0"/>
+          </a:p>
+          <a:p>
+            <a:r>
+              <a:rPr lang="ja-JP" altLang="en-US" sz="2400" dirty="0"/>
+              <a:t>どこを撮影するかの</a:t>
             </a:r>
             <a:r>
               <a:rPr lang="ja-JP" altLang="en-US" sz="2400" b="1" dirty="0">
@@ -6205,14 +6212,7 @@
             </a:r>
             <a:r>
               <a:rPr lang="ja-JP" altLang="en-US" sz="2400" dirty="0"/>
-              <a:t>が</a:t>
-            </a:r>
-            <a:endParaRPr lang="en-US" altLang="ja-JP" sz="2400" dirty="0"/>
-          </a:p>
-          <a:p>
-            <a:r>
-              <a:rPr lang="ja-JP" altLang="en-US" sz="2400" dirty="0"/>
-              <a:t>必要になります。（一応アップベクトルも必要）</a:t>
+              <a:t>が必要になります。</a:t>
             </a:r>
             <a:endParaRPr lang="en-US" altLang="ja-JP" sz="2400" dirty="0"/>
           </a:p>

--- a/ゲーム科2年/00_前期/ゲーム開発Ⅰ/01_3Dモデルの描画.pptx
+++ b/ゲーム科2年/00_前期/ゲーム開発Ⅰ/01_3Dモデルの描画.pptx
@@ -273,7 +273,7 @@
           <a:p>
             <a:fld id="{E9CC885B-4903-4D54-9A93-00025F12DED9}" type="datetimeFigureOut">
               <a:rPr kumimoji="1" lang="ja-JP" altLang="en-US" smtClean="0"/>
-              <a:t>2025/2/7</a:t>
+              <a:t>2025/4/7</a:t>
             </a:fld>
             <a:endParaRPr kumimoji="1" lang="ja-JP" altLang="en-US"/>
           </a:p>
@@ -503,7 +503,7 @@
           <a:p>
             <a:fld id="{E9CC885B-4903-4D54-9A93-00025F12DED9}" type="datetimeFigureOut">
               <a:rPr kumimoji="1" lang="ja-JP" altLang="en-US" smtClean="0"/>
-              <a:t>2025/2/7</a:t>
+              <a:t>2025/4/7</a:t>
             </a:fld>
             <a:endParaRPr kumimoji="1" lang="ja-JP" altLang="en-US"/>
           </a:p>
@@ -743,7 +743,7 @@
           <a:p>
             <a:fld id="{E9CC885B-4903-4D54-9A93-00025F12DED9}" type="datetimeFigureOut">
               <a:rPr kumimoji="1" lang="ja-JP" altLang="en-US" smtClean="0"/>
-              <a:t>2025/2/7</a:t>
+              <a:t>2025/4/7</a:t>
             </a:fld>
             <a:endParaRPr kumimoji="1" lang="ja-JP" altLang="en-US"/>
           </a:p>
@@ -973,7 +973,7 @@
           <a:p>
             <a:fld id="{E9CC885B-4903-4D54-9A93-00025F12DED9}" type="datetimeFigureOut">
               <a:rPr kumimoji="1" lang="ja-JP" altLang="en-US" smtClean="0"/>
-              <a:t>2025/2/7</a:t>
+              <a:t>2025/4/7</a:t>
             </a:fld>
             <a:endParaRPr kumimoji="1" lang="ja-JP" altLang="en-US"/>
           </a:p>
@@ -1248,7 +1248,7 @@
           <a:p>
             <a:fld id="{E9CC885B-4903-4D54-9A93-00025F12DED9}" type="datetimeFigureOut">
               <a:rPr kumimoji="1" lang="ja-JP" altLang="en-US" smtClean="0"/>
-              <a:t>2025/2/7</a:t>
+              <a:t>2025/4/7</a:t>
             </a:fld>
             <a:endParaRPr kumimoji="1" lang="ja-JP" altLang="en-US"/>
           </a:p>
@@ -1577,7 +1577,7 @@
           <a:p>
             <a:fld id="{E9CC885B-4903-4D54-9A93-00025F12DED9}" type="datetimeFigureOut">
               <a:rPr kumimoji="1" lang="ja-JP" altLang="en-US" smtClean="0"/>
-              <a:t>2025/2/7</a:t>
+              <a:t>2025/4/7</a:t>
             </a:fld>
             <a:endParaRPr kumimoji="1" lang="ja-JP" altLang="en-US"/>
           </a:p>
@@ -2053,7 +2053,7 @@
           <a:p>
             <a:fld id="{E9CC885B-4903-4D54-9A93-00025F12DED9}" type="datetimeFigureOut">
               <a:rPr kumimoji="1" lang="ja-JP" altLang="en-US" smtClean="0"/>
-              <a:t>2025/2/7</a:t>
+              <a:t>2025/4/7</a:t>
             </a:fld>
             <a:endParaRPr kumimoji="1" lang="ja-JP" altLang="en-US"/>
           </a:p>
@@ -2194,7 +2194,7 @@
           <a:p>
             <a:fld id="{E9CC885B-4903-4D54-9A93-00025F12DED9}" type="datetimeFigureOut">
               <a:rPr kumimoji="1" lang="ja-JP" altLang="en-US" smtClean="0"/>
-              <a:t>2025/2/7</a:t>
+              <a:t>2025/4/7</a:t>
             </a:fld>
             <a:endParaRPr kumimoji="1" lang="ja-JP" altLang="en-US"/>
           </a:p>
@@ -2307,7 +2307,7 @@
           <a:p>
             <a:fld id="{E9CC885B-4903-4D54-9A93-00025F12DED9}" type="datetimeFigureOut">
               <a:rPr kumimoji="1" lang="ja-JP" altLang="en-US" smtClean="0"/>
-              <a:t>2025/2/7</a:t>
+              <a:t>2025/4/7</a:t>
             </a:fld>
             <a:endParaRPr kumimoji="1" lang="ja-JP" altLang="en-US"/>
           </a:p>
@@ -2650,7 +2650,7 @@
           <a:p>
             <a:fld id="{E9CC885B-4903-4D54-9A93-00025F12DED9}" type="datetimeFigureOut">
               <a:rPr kumimoji="1" lang="ja-JP" altLang="en-US" smtClean="0"/>
-              <a:t>2025/2/7</a:t>
+              <a:t>2025/4/7</a:t>
             </a:fld>
             <a:endParaRPr kumimoji="1" lang="ja-JP" altLang="en-US"/>
           </a:p>
@@ -2938,7 +2938,7 @@
           <a:p>
             <a:fld id="{E9CC885B-4903-4D54-9A93-00025F12DED9}" type="datetimeFigureOut">
               <a:rPr kumimoji="1" lang="ja-JP" altLang="en-US" smtClean="0"/>
-              <a:t>2025/2/7</a:t>
+              <a:t>2025/4/7</a:t>
             </a:fld>
             <a:endParaRPr kumimoji="1" lang="ja-JP" altLang="en-US"/>
           </a:p>
@@ -3211,7 +3211,7 @@
           <a:p>
             <a:fld id="{E9CC885B-4903-4D54-9A93-00025F12DED9}" type="datetimeFigureOut">
               <a:rPr kumimoji="1" lang="ja-JP" altLang="en-US" smtClean="0"/>
-              <a:t>2025/2/7</a:t>
+              <a:t>2025/4/7</a:t>
             </a:fld>
             <a:endParaRPr kumimoji="1" lang="ja-JP" altLang="en-US"/>
           </a:p>
@@ -4155,10 +4155,10 @@
       </p:sp>
       <p:pic>
         <p:nvPicPr>
-          <p:cNvPr id="3" name="図 2">
-            <a:extLst>
-              <a:ext uri="{FF2B5EF4-FFF2-40B4-BE49-F238E27FC236}">
-                <a16:creationId xmlns:a16="http://schemas.microsoft.com/office/drawing/2014/main" id="{723FE1CA-3492-46A9-A647-A3BB984DD07F}"/>
+          <p:cNvPr id="5" name="図 4">
+            <a:extLst>
+              <a:ext uri="{FF2B5EF4-FFF2-40B4-BE49-F238E27FC236}">
+                <a16:creationId xmlns:a16="http://schemas.microsoft.com/office/drawing/2014/main" id="{4BEC0E91-4EE1-407A-A249-D78D63113E44}"/>
               </a:ext>
             </a:extLst>
           </p:cNvPr>
@@ -4168,13 +4168,7 @@
           <p:nvPr/>
         </p:nvPicPr>
         <p:blipFill>
-          <a:blip r:embed="rId2">
-            <a:extLst>
-              <a:ext uri="{28A0092B-C50C-407E-A947-70E740481C1C}">
-                <a14:useLocalDpi xmlns:a14="http://schemas.microsoft.com/office/drawing/2010/main" val="0"/>
-              </a:ext>
-            </a:extLst>
-          </a:blip>
+          <a:blip r:embed="rId2"/>
           <a:stretch>
             <a:fillRect/>
           </a:stretch>
@@ -4182,7 +4176,7 @@
         <p:spPr>
           <a:xfrm>
             <a:off x="567542" y="1817794"/>
-            <a:ext cx="10263579" cy="3363806"/>
+            <a:ext cx="10080398" cy="3392710"/>
           </a:xfrm>
           <a:prstGeom prst="rect">
             <a:avLst/>
@@ -4191,10 +4185,10 @@
       </p:pic>
       <p:sp>
         <p:nvSpPr>
-          <p:cNvPr id="7" name="正方形/長方形 6">
-            <a:extLst>
-              <a:ext uri="{FF2B5EF4-FFF2-40B4-BE49-F238E27FC236}">
-                <a16:creationId xmlns:a16="http://schemas.microsoft.com/office/drawing/2014/main" id="{701D0C23-CF76-4A8E-BEFE-6AC6F0C11AD8}"/>
+          <p:cNvPr id="8" name="正方形/長方形 7">
+            <a:extLst>
+              <a:ext uri="{FF2B5EF4-FFF2-40B4-BE49-F238E27FC236}">
+                <a16:creationId xmlns:a16="http://schemas.microsoft.com/office/drawing/2014/main" id="{7F711042-9347-4182-B3B0-28B0A6EC9E24}"/>
               </a:ext>
             </a:extLst>
           </p:cNvPr>
@@ -4203,8 +4197,8 @@
         </p:nvSpPr>
         <p:spPr>
           <a:xfrm>
-            <a:off x="2273300" y="2667000"/>
-            <a:ext cx="8496300" cy="1358900"/>
+            <a:off x="2347367" y="2617910"/>
+            <a:ext cx="8496300" cy="1577571"/>
           </a:xfrm>
           <a:prstGeom prst="rect">
             <a:avLst/>
@@ -7034,12 +7028,52 @@
           </a:p>
         </p:txBody>
       </p:sp>
+      <p:sp>
+        <p:nvSpPr>
+          <p:cNvPr id="11" name="テキスト ボックス 10">
+            <a:extLst>
+              <a:ext uri="{FF2B5EF4-FFF2-40B4-BE49-F238E27FC236}">
+                <a16:creationId xmlns:a16="http://schemas.microsoft.com/office/drawing/2014/main" id="{C78488A8-741D-42ED-BB92-673E66EBC940}"/>
+              </a:ext>
+            </a:extLst>
+          </p:cNvPr>
+          <p:cNvSpPr txBox="1"/>
+          <p:nvPr/>
+        </p:nvSpPr>
+        <p:spPr>
+          <a:xfrm>
+            <a:off x="567542" y="4924829"/>
+            <a:ext cx="6740948" cy="461665"/>
+          </a:xfrm>
+          <a:prstGeom prst="rect">
+            <a:avLst/>
+          </a:prstGeom>
+          <a:noFill/>
+        </p:spPr>
+        <p:txBody>
+          <a:bodyPr wrap="none" rtlCol="0">
+            <a:spAutoFit/>
+          </a:bodyPr>
+          <a:lstStyle/>
+          <a:p>
+            <a:r>
+              <a:rPr lang="en-US" altLang="ja-JP" sz="2400" dirty="0"/>
+              <a:t>2D</a:t>
+            </a:r>
+            <a:r>
+              <a:rPr lang="ja-JP" altLang="en-US" sz="2400" dirty="0"/>
+              <a:t>の時と同じく、ハンドルで紐づけされます。</a:t>
+            </a:r>
+            <a:endParaRPr lang="en-US" altLang="ja-JP" sz="2400" dirty="0"/>
+          </a:p>
+        </p:txBody>
+      </p:sp>
       <p:pic>
         <p:nvPicPr>
-          <p:cNvPr id="5" name="図 4">
-            <a:extLst>
-              <a:ext uri="{FF2B5EF4-FFF2-40B4-BE49-F238E27FC236}">
-                <a16:creationId xmlns:a16="http://schemas.microsoft.com/office/drawing/2014/main" id="{10E64F2B-7560-4A55-8BEB-22FA4D972C6D}"/>
+          <p:cNvPr id="3" name="図 2">
+            <a:extLst>
+              <a:ext uri="{FF2B5EF4-FFF2-40B4-BE49-F238E27FC236}">
+                <a16:creationId xmlns:a16="http://schemas.microsoft.com/office/drawing/2014/main" id="{6FC8CF80-46D4-4440-99C5-086DD3DFC138}"/>
               </a:ext>
             </a:extLst>
           </p:cNvPr>
@@ -7049,21 +7083,15 @@
           <p:nvPr/>
         </p:nvPicPr>
         <p:blipFill>
-          <a:blip r:embed="rId2">
-            <a:extLst>
-              <a:ext uri="{28A0092B-C50C-407E-A947-70E740481C1C}">
-                <a14:useLocalDpi xmlns:a14="http://schemas.microsoft.com/office/drawing/2010/main" val="0"/>
-              </a:ext>
-            </a:extLst>
-          </a:blip>
+          <a:blip r:embed="rId2"/>
           <a:stretch>
             <a:fillRect/>
           </a:stretch>
         </p:blipFill>
         <p:spPr>
           <a:xfrm>
-            <a:off x="567542" y="2187126"/>
-            <a:ext cx="9970370" cy="2410274"/>
+            <a:off x="567541" y="2187125"/>
+            <a:ext cx="9925011" cy="2416405"/>
           </a:xfrm>
           <a:prstGeom prst="rect">
             <a:avLst/>
@@ -7072,10 +7100,10 @@
       </p:pic>
       <p:sp>
         <p:nvSpPr>
-          <p:cNvPr id="10" name="正方形/長方形 9">
-            <a:extLst>
-              <a:ext uri="{FF2B5EF4-FFF2-40B4-BE49-F238E27FC236}">
-                <a16:creationId xmlns:a16="http://schemas.microsoft.com/office/drawing/2014/main" id="{90278562-A56E-4454-8201-4BC24A77A25B}"/>
+          <p:cNvPr id="9" name="正方形/長方形 8">
+            <a:extLst>
+              <a:ext uri="{FF2B5EF4-FFF2-40B4-BE49-F238E27FC236}">
+                <a16:creationId xmlns:a16="http://schemas.microsoft.com/office/drawing/2014/main" id="{F1F6B1F5-4A80-4AA7-80DA-980A7158E365}"/>
               </a:ext>
             </a:extLst>
           </p:cNvPr>
@@ -7084,7 +7112,7 @@
         </p:nvSpPr>
         <p:spPr>
           <a:xfrm>
-            <a:off x="2331324" y="3773634"/>
+            <a:off x="2356685" y="3634751"/>
             <a:ext cx="8438276" cy="963466"/>
           </a:xfrm>
           <a:prstGeom prst="rect">
@@ -7119,46 +7147,6 @@
           <a:p>
             <a:pPr algn="ctr"/>
             <a:endParaRPr kumimoji="1" lang="ja-JP" altLang="en-US"/>
-          </a:p>
-        </p:txBody>
-      </p:sp>
-      <p:sp>
-        <p:nvSpPr>
-          <p:cNvPr id="11" name="テキスト ボックス 10">
-            <a:extLst>
-              <a:ext uri="{FF2B5EF4-FFF2-40B4-BE49-F238E27FC236}">
-                <a16:creationId xmlns:a16="http://schemas.microsoft.com/office/drawing/2014/main" id="{C78488A8-741D-42ED-BB92-673E66EBC940}"/>
-              </a:ext>
-            </a:extLst>
-          </p:cNvPr>
-          <p:cNvSpPr txBox="1"/>
-          <p:nvPr/>
-        </p:nvSpPr>
-        <p:spPr>
-          <a:xfrm>
-            <a:off x="567542" y="4924829"/>
-            <a:ext cx="6740948" cy="461665"/>
-          </a:xfrm>
-          <a:prstGeom prst="rect">
-            <a:avLst/>
-          </a:prstGeom>
-          <a:noFill/>
-        </p:spPr>
-        <p:txBody>
-          <a:bodyPr wrap="none" rtlCol="0">
-            <a:spAutoFit/>
-          </a:bodyPr>
-          <a:lstStyle/>
-          <a:p>
-            <a:r>
-              <a:rPr lang="en-US" altLang="ja-JP" sz="2400" dirty="0"/>
-              <a:t>2D</a:t>
-            </a:r>
-            <a:r>
-              <a:rPr lang="ja-JP" altLang="en-US" sz="2400" dirty="0"/>
-              <a:t>の時と同じく、ハンドルで紐づけされます。</a:t>
-            </a:r>
-            <a:endParaRPr lang="en-US" altLang="ja-JP" sz="2400" dirty="0"/>
           </a:p>
         </p:txBody>
       </p:sp>
